--- a/skills/overview-deck/assets/skeletons/thank_you.pptx
+++ b/skills/overview-deck/assets/skeletons/thank_you.pptx
@@ -22725,7 +22725,7 @@
                 <a:cs typeface="Montserrat"/>
                 <a:sym typeface="Montserrat"/>
               </a:rPr>
-              <a:t>aagarwal@overview.ai</a:t>
+              <a:t>{{contact_email}}</a:t>
             </a:r>
             <a:endParaRPr b="0" i="0" sz="1867" u="none" cap="none" strike="noStrike">
               <a:solidFill>
@@ -22765,7 +22765,7 @@
                 <a:cs typeface="Montserrat"/>
                 <a:sym typeface="Montserrat"/>
               </a:rPr>
-              <a:t>(510) 880-1463</a:t>
+              <a:t>{{contact_phone}}</a:t>
             </a:r>
             <a:endParaRPr b="0" i="0" sz="1867" u="none" cap="none" strike="noStrike">
               <a:solidFill>
@@ -22831,7 +22831,7 @@
                 <a:cs typeface="Montserrat SemiBold"/>
                 <a:sym typeface="Montserrat SemiBold"/>
               </a:rPr>
-              <a:t>Akshat Agarwal</a:t>
+              <a:t>{{contact_name}}</a:t>
             </a:r>
             <a:endParaRPr b="0" i="0" sz="3200" u="none" cap="none" strike="noStrike">
               <a:solidFill>
